--- a/Lightning_Talk_2.pptx
+++ b/Lightning_Talk_2.pptx
@@ -3692,7 +3692,7 @@
                 <a:ea typeface="Times New Roman" pitchFamily="34" charset="-122"/>
                 <a:cs typeface="Times New Roman" pitchFamily="34" charset="-120"/>
               </a:rPr>
-              <a:t>Challenges &amp; Next Steps</a:t>
+              <a:t>Work Done &amp; Next Steps</a:t>
             </a:r>
             <a:endParaRPr lang="en-US" sz="3400" dirty="0"/>
           </a:p>
@@ -8968,7 +8968,7 @@
                 <a:ea typeface="Times New Roman" pitchFamily="34" charset="-122"/>
                 <a:cs typeface="Times New Roman" pitchFamily="34" charset="-120"/>
               </a:rPr>
-              <a:t>Waveform — Phase A, m1, 100% speed, 1,024 samples:</a:t>
+              <a:t>Waveform — Phase A, m1, 3 conditions, 100% speed, 1,024 samples:</a:t>
             </a:r>
             <a:endParaRPr lang="en-US" sz="1400" dirty="0"/>
           </a:p>
@@ -9021,7 +9021,7 @@
         </p:nvSpPr>
         <p:spPr>
           <a:xfrm>
-            <a:off x="548640" y="3749040"/>
+            <a:off x="548640" y="4248773"/>
             <a:ext cx="11064240" cy="274320"/>
           </a:xfrm>
           <a:prstGeom prst="rect">
@@ -9142,8 +9142,8 @@
         </p:blipFill>
         <p:spPr>
           <a:xfrm>
-            <a:off x="548641" y="4041649"/>
-            <a:ext cx="11062800" cy="1759734"/>
+            <a:off x="548641" y="4497571"/>
+            <a:ext cx="11062800" cy="1303811"/>
           </a:xfrm>
           <a:prstGeom prst="rect">
             <a:avLst/>
@@ -9152,10 +9152,10 @@
       </p:pic>
       <p:pic>
         <p:nvPicPr>
-          <p:cNvPr id="23" name="Picture 22">
+          <p:cNvPr id="9" name="Picture 8">
             <a:extLst>
               <a:ext uri="{FF2B5EF4-FFF2-40B4-BE49-F238E27FC236}">
-                <a16:creationId xmlns:a16="http://schemas.microsoft.com/office/drawing/2014/main" id="{2B115806-75F1-09D1-8ADA-A92FDE4D0323}"/>
+                <a16:creationId xmlns:a16="http://schemas.microsoft.com/office/drawing/2014/main" id="{D562D394-C41C-B3E6-0D2C-D962122695E4}"/>
               </a:ext>
             </a:extLst>
           </p:cNvPr>
@@ -9172,8 +9172,8 @@
         </p:blipFill>
         <p:spPr>
           <a:xfrm>
-            <a:off x="579121" y="1664209"/>
-            <a:ext cx="11032318" cy="2011680"/>
+            <a:off x="1034549" y="1645920"/>
+            <a:ext cx="9942128" cy="2602853"/>
           </a:xfrm>
           <a:prstGeom prst="rect">
             <a:avLst/>
